--- a/The-Soulful-Strings-Sitar-and-Veena.pptx
+++ b/The-Soulful-Strings-Sitar-and-Veena.pptx
@@ -1446,27 +1446,77 @@
         </p:nvSpPr>
         <p:spPr>
           <a:xfrm>
-            <a:off x="2133600" y="1546225"/>
-            <a:ext cx="6563222" cy="515526"/>
+            <a:off x="152400" y="1546225"/>
+            <a:ext cx="11277600" cy="4534639"/>
           </a:xfrm>
         </p:spPr>
         <p:txBody>
           <a:bodyPr/>
           <a:lstStyle/>
           <a:p>
-            <a:r>
-              <a:rPr lang="en-US" dirty="0" err="1" smtClean="0"/>
+            <a:pPr>
+              <a:lnSpc>
+                <a:spcPct val="150000"/>
+              </a:lnSpc>
+            </a:pPr>
+            <a:r>
+              <a:rPr lang="en-US" b="0" dirty="0"/>
+              <a:t>Name : </a:t>
+            </a:r>
+            <a:r>
+              <a:rPr lang="en-US" b="0" dirty="0" err="1"/>
+              <a:t>Rangiya</a:t>
+            </a:r>
+            <a:r>
+              <a:rPr lang="en-US" b="0" dirty="0"/>
+              <a:t> </a:t>
+            </a:r>
+            <a:r>
+              <a:rPr lang="en-US" b="0" dirty="0" err="1"/>
               <a:t>Poojan</a:t>
             </a:r>
             <a:r>
-              <a:rPr lang="en-US" dirty="0" smtClean="0"/>
-              <a:t> </a:t>
-            </a:r>
-            <a:r>
-              <a:rPr lang="en-US" dirty="0" err="1" smtClean="0"/>
-              <a:t>Ranjya</a:t>
-            </a:r>
-            <a:endParaRPr lang="en-IN" dirty="0"/>
+              <a:rPr lang="en-US" b="0" dirty="0"/>
+              <a:t> j.</a:t>
+            </a:r>
+            <a:br>
+              <a:rPr lang="en-US" b="0" dirty="0"/>
+            </a:br>
+            <a:r>
+              <a:rPr lang="en-US" b="0" dirty="0" err="1"/>
+              <a:t>Regi</a:t>
+            </a:r>
+            <a:r>
+              <a:rPr lang="en-US" b="0" dirty="0"/>
+              <a:t> no : 250130380029</a:t>
+            </a:r>
+            <a:br>
+              <a:rPr lang="en-US" b="0" dirty="0"/>
+            </a:br>
+            <a:r>
+              <a:rPr lang="en-US" b="0" dirty="0"/>
+              <a:t>Department : BSC Microbiology</a:t>
+            </a:r>
+            <a:br>
+              <a:rPr lang="en-US" b="0" dirty="0"/>
+            </a:br>
+            <a:r>
+              <a:rPr lang="en-US" b="0" dirty="0"/>
+              <a:t>Assignment topic :Famous instruments of </a:t>
+            </a:r>
+            <a:r>
+              <a:rPr lang="en-US" b="0" dirty="0" err="1"/>
+              <a:t>india</a:t>
+            </a:r>
+            <a:r>
+              <a:rPr lang="en-US" b="0" dirty="0"/>
+              <a:t>-sitar and </a:t>
+            </a:r>
+            <a:r>
+              <a:rPr lang="en-US" b="0" dirty="0" err="1"/>
+              <a:t>veena</a:t>
+            </a:r>
+            <a:endParaRPr lang="en-IN" b="0" dirty="0"/>
           </a:p>
         </p:txBody>
       </p:sp>
